--- a/ppt/第4课_机器人语音识别与语音合成.pptx
+++ b/ppt/第4课_机器人语音识别与语音合成.pptx
@@ -142,7 +142,7 @@
   <p:extLst>
     <p:ext uri="{EFAFB233-063F-42B5-8137-9DF3F51BA10A}">
       <p15:sldGuideLst xmlns:p15="http://schemas.microsoft.com/office/powerpoint/2012/main">
-        <p15:guide id="1" pos="3851" userDrawn="1">
+        <p15:guide id="1" pos="3849" userDrawn="1">
           <p15:clr>
             <a:srgbClr val="A4A3A4"/>
           </p15:clr>
@@ -8957,7 +8957,7 @@
         </p:nvSpPr>
         <p:spPr>
           <a:xfrm>
-            <a:off x="2003201" y="2431690"/>
+            <a:off x="2039396" y="2431690"/>
             <a:ext cx="7804514" cy="2122805"/>
           </a:xfrm>
           <a:prstGeom prst="rect">

--- a/ppt/第4课_机器人语音识别与语音合成.pptx
+++ b/ppt/第4课_机器人语音识别与语音合成.pptx
@@ -6,14 +6,14 @@
     <p:sldMasterId id="2147483655" r:id="rId3"/>
   </p:sldMasterIdLst>
   <p:notesMasterIdLst>
-    <p:notesMasterId r:id="rId5"/>
+    <p:notesMasterId r:id="rId6"/>
   </p:notesMasterIdLst>
   <p:handoutMasterIdLst>
     <p:handoutMasterId r:id="rId34"/>
   </p:handoutMasterIdLst>
   <p:sldIdLst>
-    <p:sldId id="322" r:id="rId4"/>
-    <p:sldId id="364" r:id="rId6"/>
+    <p:sldId id="470" r:id="rId4"/>
+    <p:sldId id="364" r:id="rId5"/>
     <p:sldId id="445" r:id="rId7"/>
     <p:sldId id="446" r:id="rId8"/>
     <p:sldId id="447" r:id="rId9"/>
@@ -2230,84 +2230,6 @@
 </file>
 
 <file path=ppt/notesSlides/notesSlide28.xml><?xml version="1.0" encoding="utf-8"?>
-<p:notes xmlns:a="http://schemas.openxmlformats.org/drawingml/2006/main" xmlns:r="http://schemas.openxmlformats.org/officeDocument/2006/relationships" xmlns:p="http://schemas.openxmlformats.org/presentationml/2006/main">
-  <p:cSld>
-    <p:spTree>
-      <p:nvGrpSpPr>
-        <p:cNvPr id="1" name=""/>
-        <p:cNvGrpSpPr/>
-        <p:nvPr/>
-      </p:nvGrpSpPr>
-      <p:grpSpPr>
-        <a:xfrm>
-          <a:off x="0" y="0"/>
-          <a:ext cx="0" cy="0"/>
-          <a:chOff x="0" y="0"/>
-          <a:chExt cx="0" cy="0"/>
-        </a:xfrm>
-      </p:grpSpPr>
-      <p:sp>
-        <p:nvSpPr>
-          <p:cNvPr id="2" name="幻灯片图像占位符 1"/>
-          <p:cNvSpPr>
-            <a:spLocks noGrp="1" noRot="1" noChangeAspect="1"/>
-          </p:cNvSpPr>
-          <p:nvPr>
-            <p:ph type="sldImg"/>
-          </p:nvPr>
-        </p:nvSpPr>
-        <p:spPr/>
-      </p:sp>
-      <p:sp>
-        <p:nvSpPr>
-          <p:cNvPr id="3" name="备注占位符 2"/>
-          <p:cNvSpPr>
-            <a:spLocks noGrp="1"/>
-          </p:cNvSpPr>
-          <p:nvPr>
-            <p:ph type="body" idx="1"/>
-          </p:nvPr>
-        </p:nvSpPr>
-        <p:spPr/>
-        <p:txBody>
-          <a:bodyPr/>
-          <a:lstStyle/>
-          <a:p>
-            <a:endParaRPr lang="zh-CN" altLang="en-US" dirty="0"/>
-          </a:p>
-        </p:txBody>
-      </p:sp>
-      <p:sp>
-        <p:nvSpPr>
-          <p:cNvPr id="4" name="灯片编号占位符 3"/>
-          <p:cNvSpPr>
-            <a:spLocks noGrp="1"/>
-          </p:cNvSpPr>
-          <p:nvPr>
-            <p:ph type="sldNum" sz="quarter" idx="10"/>
-          </p:nvPr>
-        </p:nvSpPr>
-        <p:spPr/>
-        <p:txBody>
-          <a:bodyPr/>
-          <a:lstStyle/>
-          <a:p>
-            <a:fld id="{CD629C50-E8D2-44C1-A6BB-3798535718E9}" type="slidenum">
-              <a:rPr lang="zh-CN" altLang="en-US" smtClean="0"/>
-            </a:fld>
-            <a:endParaRPr lang="zh-CN" altLang="en-US"/>
-          </a:p>
-        </p:txBody>
-      </p:sp>
-    </p:spTree>
-  </p:cSld>
-  <p:clrMapOvr>
-    <a:masterClrMapping/>
-  </p:clrMapOvr>
-</p:notes>
-</file>
-
-<file path=ppt/notesSlides/notesSlide29.xml><?xml version="1.0" encoding="utf-8"?>
 <p:notes xmlns:a="http://schemas.openxmlformats.org/drawingml/2006/main" xmlns:r="http://schemas.openxmlformats.org/officeDocument/2006/relationships" xmlns:p="http://schemas.openxmlformats.org/presentationml/2006/main">
   <p:cSld>
     <p:spTree>
@@ -8935,20 +8857,24 @@
 <file path=ppt/slides/slide1.xml><?xml version="1.0" encoding="utf-8"?>
 <p:sld xmlns:a="http://schemas.openxmlformats.org/drawingml/2006/main" xmlns:r="http://schemas.openxmlformats.org/officeDocument/2006/relationships" xmlns:p="http://schemas.openxmlformats.org/presentationml/2006/main">
   <p:cSld>
+    <p:bg>
+      <p:bgPr>
+        <a:blipFill rotWithShape="1">
+          <a:blip r:embed="rId1"/>
+          <a:stretch>
+            <a:fillRect/>
+          </a:stretch>
+        </a:blipFill>
+        <a:effectLst/>
+      </p:bgPr>
+    </p:bg>
     <p:spTree>
       <p:nvGrpSpPr>
         <p:cNvPr id="1" name=""/>
         <p:cNvGrpSpPr/>
         <p:nvPr/>
       </p:nvGrpSpPr>
-      <p:grpSpPr>
-        <a:xfrm>
-          <a:off x="0" y="0"/>
-          <a:ext cx="0" cy="0"/>
-          <a:chOff x="0" y="0"/>
-          <a:chExt cx="0" cy="0"/>
-        </a:xfrm>
-      </p:grpSpPr>
+      <p:grpSpPr/>
       <p:sp>
         <p:nvSpPr>
           <p:cNvPr id="5" name="矩形 4"/>
@@ -8957,8 +8883,8 @@
         </p:nvSpPr>
         <p:spPr>
           <a:xfrm>
-            <a:off x="2039396" y="2431690"/>
-            <a:ext cx="7804514" cy="2122805"/>
+            <a:off x="2526030" y="2045970"/>
+            <a:ext cx="6971665" cy="2122805"/>
           </a:xfrm>
           <a:prstGeom prst="rect">
             <a:avLst/>
@@ -8985,24 +8911,9 @@
                     </a:schemeClr>
                   </a:outerShdw>
                 </a:effectLst>
+                <a:sym typeface="+mn-ea"/>
               </a:rPr>
-              <a:t>机器人语音识别与语音</a:t>
-            </a:r>
-            <a:r>
-              <a:rPr lang="zh-CN" altLang="en-US" sz="6600" dirty="0" smtClean="0">
-                <a:ln w="0"/>
-                <a:solidFill>
-                  <a:srgbClr val="157DA8"/>
-                </a:solidFill>
-                <a:effectLst>
-                  <a:outerShdw blurRad="38100" dist="19050" dir="2700000" algn="tl" rotWithShape="0">
-                    <a:schemeClr val="dk1">
-                      <a:alpha val="40000"/>
-                    </a:schemeClr>
-                  </a:outerShdw>
-                </a:effectLst>
-              </a:rPr>
-              <a:t>合成</a:t>
+              <a:t>机器人语音识别与语音合成</a:t>
             </a:r>
             <a:endParaRPr lang="zh-CN" altLang="en-US" sz="6600" dirty="0" smtClean="0">
               <a:ln w="0"/>
@@ -9020,18 +8931,55 @@
           </a:p>
         </p:txBody>
       </p:sp>
+      <p:sp>
+        <p:nvSpPr>
+          <p:cNvPr id="2" name="文本框 1"/>
+          <p:cNvSpPr txBox="1"/>
+          <p:nvPr/>
+        </p:nvSpPr>
+        <p:spPr>
+          <a:xfrm>
+            <a:off x="9265920" y="86360"/>
+            <a:ext cx="2987675" cy="645160"/>
+          </a:xfrm>
+          <a:prstGeom prst="rect">
+            <a:avLst/>
+          </a:prstGeom>
+          <a:noFill/>
+        </p:spPr>
+        <p:txBody>
+          <a:bodyPr wrap="square" rtlCol="0">
+            <a:spAutoFit/>
+          </a:bodyPr>
+          <a:p>
+            <a:r>
+              <a:rPr lang="zh-CN" altLang="en-US"/>
+              <a:t>上海交通大学学生创新</a:t>
+            </a:r>
+            <a:r>
+              <a:rPr lang="zh-CN" altLang="en-US"/>
+              <a:t>中心</a:t>
+            </a:r>
+            <a:endParaRPr lang="zh-CN" altLang="en-US"/>
+          </a:p>
+          <a:p>
+            <a:r>
+              <a:rPr lang="zh-CN" altLang="en-US"/>
+              <a:t>上海仪酷智能科技</a:t>
+            </a:r>
+            <a:r>
+              <a:rPr lang="zh-CN" altLang="en-US"/>
+              <a:t>有限公司</a:t>
+            </a:r>
+            <a:endParaRPr lang="zh-CN" altLang="en-US"/>
+          </a:p>
+        </p:txBody>
+      </p:sp>
     </p:spTree>
   </p:cSld>
   <p:clrMapOvr>
     <a:masterClrMapping/>
   </p:clrMapOvr>
-  <p:timing>
-    <p:tnLst>
-      <p:par>
-        <p:cTn id="1" dur="indefinite" restart="never" nodeType="tmRoot"/>
-      </p:par>
-    </p:tnLst>
-  </p:timing>
 </p:sld>
 </file>
 
